--- a/3_CGE/Game_theory_2024/5_Visualisation/Figure_4.pptx
+++ b/3_CGE/Game_theory_2024/5_Visualisation/Figure_4.pptx
@@ -243,7 +243,7 @@
           <a:p>
             <a:fld id="{EED1C14C-A143-42F5-B247-D0E800131009}" type="datetimeFigureOut">
               <a:rPr lang="en-US" smtClean="0"/>
-              <a:t>3/4/2025</a:t>
+              <a:t>12/17/2025</a:t>
             </a:fld>
             <a:endParaRPr lang="en-US"/>
           </a:p>
@@ -413,7 +413,7 @@
           <a:p>
             <a:fld id="{EED1C14C-A143-42F5-B247-D0E800131009}" type="datetimeFigureOut">
               <a:rPr lang="en-US" smtClean="0"/>
-              <a:t>3/4/2025</a:t>
+              <a:t>12/17/2025</a:t>
             </a:fld>
             <a:endParaRPr lang="en-US"/>
           </a:p>
@@ -593,7 +593,7 @@
           <a:p>
             <a:fld id="{EED1C14C-A143-42F5-B247-D0E800131009}" type="datetimeFigureOut">
               <a:rPr lang="en-US" smtClean="0"/>
-              <a:t>3/4/2025</a:t>
+              <a:t>12/17/2025</a:t>
             </a:fld>
             <a:endParaRPr lang="en-US"/>
           </a:p>
@@ -763,7 +763,7 @@
           <a:p>
             <a:fld id="{EED1C14C-A143-42F5-B247-D0E800131009}" type="datetimeFigureOut">
               <a:rPr lang="en-US" smtClean="0"/>
-              <a:t>3/4/2025</a:t>
+              <a:t>12/17/2025</a:t>
             </a:fld>
             <a:endParaRPr lang="en-US"/>
           </a:p>
@@ -1007,7 +1007,7 @@
           <a:p>
             <a:fld id="{EED1C14C-A143-42F5-B247-D0E800131009}" type="datetimeFigureOut">
               <a:rPr lang="en-US" smtClean="0"/>
-              <a:t>3/4/2025</a:t>
+              <a:t>12/17/2025</a:t>
             </a:fld>
             <a:endParaRPr lang="en-US"/>
           </a:p>
@@ -1239,7 +1239,7 @@
           <a:p>
             <a:fld id="{EED1C14C-A143-42F5-B247-D0E800131009}" type="datetimeFigureOut">
               <a:rPr lang="en-US" smtClean="0"/>
-              <a:t>3/4/2025</a:t>
+              <a:t>12/17/2025</a:t>
             </a:fld>
             <a:endParaRPr lang="en-US"/>
           </a:p>
@@ -1606,7 +1606,7 @@
           <a:p>
             <a:fld id="{EED1C14C-A143-42F5-B247-D0E800131009}" type="datetimeFigureOut">
               <a:rPr lang="en-US" smtClean="0"/>
-              <a:t>3/4/2025</a:t>
+              <a:t>12/17/2025</a:t>
             </a:fld>
             <a:endParaRPr lang="en-US"/>
           </a:p>
@@ -1724,7 +1724,7 @@
           <a:p>
             <a:fld id="{EED1C14C-A143-42F5-B247-D0E800131009}" type="datetimeFigureOut">
               <a:rPr lang="en-US" smtClean="0"/>
-              <a:t>3/4/2025</a:t>
+              <a:t>12/17/2025</a:t>
             </a:fld>
             <a:endParaRPr lang="en-US"/>
           </a:p>
@@ -1819,7 +1819,7 @@
           <a:p>
             <a:fld id="{EED1C14C-A143-42F5-B247-D0E800131009}" type="datetimeFigureOut">
               <a:rPr lang="en-US" smtClean="0"/>
-              <a:t>3/4/2025</a:t>
+              <a:t>12/17/2025</a:t>
             </a:fld>
             <a:endParaRPr lang="en-US"/>
           </a:p>
@@ -2096,7 +2096,7 @@
           <a:p>
             <a:fld id="{EED1C14C-A143-42F5-B247-D0E800131009}" type="datetimeFigureOut">
               <a:rPr lang="en-US" smtClean="0"/>
-              <a:t>3/4/2025</a:t>
+              <a:t>12/17/2025</a:t>
             </a:fld>
             <a:endParaRPr lang="en-US"/>
           </a:p>
@@ -2353,7 +2353,7 @@
           <a:p>
             <a:fld id="{EED1C14C-A143-42F5-B247-D0E800131009}" type="datetimeFigureOut">
               <a:rPr lang="en-US" smtClean="0"/>
-              <a:t>3/4/2025</a:t>
+              <a:t>12/17/2025</a:t>
             </a:fld>
             <a:endParaRPr lang="en-US"/>
           </a:p>
@@ -2566,7 +2566,7 @@
           <a:p>
             <a:fld id="{EED1C14C-A143-42F5-B247-D0E800131009}" type="datetimeFigureOut">
               <a:rPr lang="en-US" smtClean="0"/>
-              <a:t>3/4/2025</a:t>
+              <a:t>12/17/2025</a:t>
             </a:fld>
             <a:endParaRPr lang="en-US"/>
           </a:p>
@@ -2973,10 +2973,10 @@
       </p:grpSpPr>
       <p:grpSp>
         <p:nvGrpSpPr>
-          <p:cNvPr id="13" name="Group 12">
+          <p:cNvPr id="7" name="Group 6">
             <a:extLst>
               <a:ext uri="{FF2B5EF4-FFF2-40B4-BE49-F238E27FC236}">
-                <a16:creationId xmlns:a16="http://schemas.microsoft.com/office/drawing/2014/main" id="{2AFC17A1-34E1-2276-F28D-7532535872B1}"/>
+                <a16:creationId xmlns:a16="http://schemas.microsoft.com/office/drawing/2014/main" id="{07A75131-9D5A-7753-1C28-5A133B3DB560}"/>
               </a:ext>
             </a:extLst>
           </p:cNvPr>
@@ -2985,18 +2985,115 @@
         </p:nvGrpSpPr>
         <p:grpSpPr>
           <a:xfrm>
-            <a:off x="809329" y="0"/>
-            <a:ext cx="5239342" cy="9906000"/>
-            <a:chOff x="809329" y="0"/>
-            <a:chExt cx="5239342" cy="9906000"/>
+            <a:off x="492081" y="0"/>
+            <a:ext cx="5599404" cy="9866157"/>
+            <a:chOff x="492081" y="0"/>
+            <a:chExt cx="5599404" cy="9866157"/>
           </a:xfrm>
         </p:grpSpPr>
+        <p:grpSp>
+          <p:nvGrpSpPr>
+            <p:cNvPr id="13" name="Group 12">
+              <a:extLst>
+                <a:ext uri="{FF2B5EF4-FFF2-40B4-BE49-F238E27FC236}">
+                  <a16:creationId xmlns:a16="http://schemas.microsoft.com/office/drawing/2014/main" id="{2AFC17A1-34E1-2276-F28D-7532535872B1}"/>
+                </a:ext>
+              </a:extLst>
+            </p:cNvPr>
+            <p:cNvGrpSpPr/>
+            <p:nvPr/>
+          </p:nvGrpSpPr>
+          <p:grpSpPr>
+            <a:xfrm>
+              <a:off x="492081" y="0"/>
+              <a:ext cx="274434" cy="6548605"/>
+              <a:chOff x="1009535" y="0"/>
+              <a:chExt cx="274434" cy="6548605"/>
+            </a:xfrm>
+          </p:grpSpPr>
+          <p:sp>
+            <p:nvSpPr>
+              <p:cNvPr id="11" name="TextBox 10">
+                <a:extLst>
+                  <a:ext uri="{FF2B5EF4-FFF2-40B4-BE49-F238E27FC236}">
+                    <a16:creationId xmlns:a16="http://schemas.microsoft.com/office/drawing/2014/main" id="{7B716E2A-9F1A-F825-8D69-1ACDCEDDD00F}"/>
+                  </a:ext>
+                </a:extLst>
+              </p:cNvPr>
+              <p:cNvSpPr txBox="1"/>
+              <p:nvPr/>
+            </p:nvSpPr>
+            <p:spPr>
+              <a:xfrm>
+                <a:off x="1009535" y="0"/>
+                <a:ext cx="264816" cy="307777"/>
+              </a:xfrm>
+              <a:prstGeom prst="rect">
+                <a:avLst/>
+              </a:prstGeom>
+              <a:noFill/>
+            </p:spPr>
+            <p:txBody>
+              <a:bodyPr wrap="none" rtlCol="0">
+                <a:spAutoFit/>
+              </a:bodyPr>
+              <a:lstStyle/>
+              <a:p>
+                <a:r>
+                  <a:rPr lang="en-US" sz="1400" dirty="0">
+                    <a:latin typeface="Times New Roman" panose="02020603050405020304" pitchFamily="18" charset="0"/>
+                    <a:cs typeface="Times New Roman" panose="02020603050405020304" pitchFamily="18" charset="0"/>
+                  </a:rPr>
+                  <a:t>a</a:t>
+                </a:r>
+              </a:p>
+            </p:txBody>
+          </p:sp>
+          <p:sp>
+            <p:nvSpPr>
+              <p:cNvPr id="12" name="TextBox 11">
+                <a:extLst>
+                  <a:ext uri="{FF2B5EF4-FFF2-40B4-BE49-F238E27FC236}">
+                    <a16:creationId xmlns:a16="http://schemas.microsoft.com/office/drawing/2014/main" id="{883949B9-E401-9051-F8FC-E87B4345C72F}"/>
+                  </a:ext>
+                </a:extLst>
+              </p:cNvPr>
+              <p:cNvSpPr txBox="1"/>
+              <p:nvPr/>
+            </p:nvSpPr>
+            <p:spPr>
+              <a:xfrm>
+                <a:off x="1009535" y="6240828"/>
+                <a:ext cx="274434" cy="307777"/>
+              </a:xfrm>
+              <a:prstGeom prst="rect">
+                <a:avLst/>
+              </a:prstGeom>
+              <a:noFill/>
+            </p:spPr>
+            <p:txBody>
+              <a:bodyPr wrap="none" rtlCol="0">
+                <a:spAutoFit/>
+              </a:bodyPr>
+              <a:lstStyle/>
+              <a:p>
+                <a:r>
+                  <a:rPr lang="en-US" sz="1400" dirty="0">
+                    <a:latin typeface="Times New Roman" panose="02020603050405020304" pitchFamily="18" charset="0"/>
+                    <a:cs typeface="Times New Roman" panose="02020603050405020304" pitchFamily="18" charset="0"/>
+                  </a:rPr>
+                  <a:t>b</a:t>
+                </a:r>
+              </a:p>
+            </p:txBody>
+          </p:sp>
+        </p:grpSp>
         <p:pic>
           <p:nvPicPr>
-            <p:cNvPr id="3" name="Picture 2" descr="A screenshot of a map&#10;&#10;AI-generated content may be incorrect.">
+            <p:cNvPr id="4" name="Picture 3" descr="A screenshot of a map&#10;&#10;AI-generated content may be incorrect.">
               <a:extLst>
                 <a:ext uri="{FF2B5EF4-FFF2-40B4-BE49-F238E27FC236}">
-                  <a16:creationId xmlns:a16="http://schemas.microsoft.com/office/drawing/2014/main" id="{81F143F9-C58B-B024-FB11-D20FA32CCC49}"/>
+                  <a16:creationId xmlns:a16="http://schemas.microsoft.com/office/drawing/2014/main" id="{50902C3F-CE51-EAB0-4DDD-423A230093A4}"/>
                 </a:ext>
               </a:extLst>
             </p:cNvPr>
@@ -3019,8 +3116,8 @@
           </p:blipFill>
           <p:spPr>
             <a:xfrm>
-              <a:off x="1274352" y="0"/>
-              <a:ext cx="4309297" cy="6097158"/>
+              <a:off x="1273683" y="0"/>
+              <a:ext cx="4310634" cy="6099048"/>
             </a:xfrm>
             <a:prstGeom prst="rect">
               <a:avLst/>
@@ -3029,10 +3126,10 @@
         </p:pic>
         <p:pic>
           <p:nvPicPr>
-            <p:cNvPr id="10" name="Picture 9" descr="A screenshot of a computer screen&#10;&#10;AI-generated content may be incorrect.">
+            <p:cNvPr id="6" name="Picture 5" descr="A screenshot of a computer screen&#10;&#10;AI-generated content may be incorrect.">
               <a:extLst>
                 <a:ext uri="{FF2B5EF4-FFF2-40B4-BE49-F238E27FC236}">
-                  <a16:creationId xmlns:a16="http://schemas.microsoft.com/office/drawing/2014/main" id="{08301F2B-2A88-75F6-5E70-9EBC9928F2C7}"/>
+                  <a16:creationId xmlns:a16="http://schemas.microsoft.com/office/drawing/2014/main" id="{DB5BA0A5-5CBE-62FB-D45F-9883D025B03D}"/>
                 </a:ext>
               </a:extLst>
             </p:cNvPr>
@@ -3055,90 +3152,14 @@
           </p:blipFill>
           <p:spPr>
             <a:xfrm>
-              <a:off x="809329" y="6199469"/>
-              <a:ext cx="5239342" cy="3706531"/>
+              <a:off x="766515" y="6099048"/>
+              <a:ext cx="5324970" cy="3767109"/>
             </a:xfrm>
             <a:prstGeom prst="rect">
               <a:avLst/>
             </a:prstGeom>
           </p:spPr>
         </p:pic>
-        <p:sp>
-          <p:nvSpPr>
-            <p:cNvPr id="11" name="TextBox 10">
-              <a:extLst>
-                <a:ext uri="{FF2B5EF4-FFF2-40B4-BE49-F238E27FC236}">
-                  <a16:creationId xmlns:a16="http://schemas.microsoft.com/office/drawing/2014/main" id="{7B716E2A-9F1A-F825-8D69-1ACDCEDDD00F}"/>
-                </a:ext>
-              </a:extLst>
-            </p:cNvPr>
-            <p:cNvSpPr txBox="1"/>
-            <p:nvPr/>
-          </p:nvSpPr>
-          <p:spPr>
-            <a:xfrm>
-              <a:off x="1009535" y="0"/>
-              <a:ext cx="264816" cy="307777"/>
-            </a:xfrm>
-            <a:prstGeom prst="rect">
-              <a:avLst/>
-            </a:prstGeom>
-            <a:noFill/>
-          </p:spPr>
-          <p:txBody>
-            <a:bodyPr wrap="none" rtlCol="0">
-              <a:spAutoFit/>
-            </a:bodyPr>
-            <a:lstStyle/>
-            <a:p>
-              <a:r>
-                <a:rPr lang="en-US" sz="1400" dirty="0">
-                  <a:latin typeface="Times New Roman" panose="02020603050405020304" pitchFamily="18" charset="0"/>
-                  <a:cs typeface="Times New Roman" panose="02020603050405020304" pitchFamily="18" charset="0"/>
-                </a:rPr>
-                <a:t>a</a:t>
-              </a:r>
-            </a:p>
-          </p:txBody>
-        </p:sp>
-        <p:sp>
-          <p:nvSpPr>
-            <p:cNvPr id="12" name="TextBox 11">
-              <a:extLst>
-                <a:ext uri="{FF2B5EF4-FFF2-40B4-BE49-F238E27FC236}">
-                  <a16:creationId xmlns:a16="http://schemas.microsoft.com/office/drawing/2014/main" id="{883949B9-E401-9051-F8FC-E87B4345C72F}"/>
-                </a:ext>
-              </a:extLst>
-            </p:cNvPr>
-            <p:cNvSpPr txBox="1"/>
-            <p:nvPr/>
-          </p:nvSpPr>
-          <p:spPr>
-            <a:xfrm>
-              <a:off x="1009535" y="6240828"/>
-              <a:ext cx="274434" cy="307777"/>
-            </a:xfrm>
-            <a:prstGeom prst="rect">
-              <a:avLst/>
-            </a:prstGeom>
-            <a:noFill/>
-          </p:spPr>
-          <p:txBody>
-            <a:bodyPr wrap="none" rtlCol="0">
-              <a:spAutoFit/>
-            </a:bodyPr>
-            <a:lstStyle/>
-            <a:p>
-              <a:r>
-                <a:rPr lang="en-US" sz="1400" dirty="0">
-                  <a:latin typeface="Times New Roman" panose="02020603050405020304" pitchFamily="18" charset="0"/>
-                  <a:cs typeface="Times New Roman" panose="02020603050405020304" pitchFamily="18" charset="0"/>
-                </a:rPr>
-                <a:t>b</a:t>
-              </a:r>
-            </a:p>
-          </p:txBody>
-        </p:sp>
       </p:grpSp>
     </p:spTree>
     <p:extLst>
